--- a/dataset/guides_final/HW/guide/IT-HW-003_프린터·복합기 이용 가이드.pptx
+++ b/dataset/guides_final/HW/guide/IT-HW-003_프린터·복합기 이용 가이드.pptx
@@ -3245,7 +3245,7 @@
                 <a:ea typeface="Malgun Gothic"/>
                 <a:cs typeface="Malgun Gothic"/>
               </a:rPr>
-              <a:t>한화시스템 ICT 임직원 IT 안내 · HW·업무 PC</a:t>
+              <a:t>가상 ICT 기업 임직원 IT 안내 · HW·업무 PC</a:t>
             </a:r>
           </a:p>
         </p:txBody>
@@ -3477,7 +3477,7 @@
                 <a:ea typeface="Malgun Gothic"/>
                 <a:cs typeface="Malgun Gothic"/>
               </a:rPr>
-              <a:t>© HANWHA SYSTEMS ICT · IT-HW-003 · 사내 일반</a:t>
+              <a:t>© 가상 ICT 기업 · IT-HW-003 · 사내 일반</a:t>
             </a:r>
           </a:p>
         </p:txBody>
@@ -5285,7 +5285,7 @@
                 <a:ea typeface="Malgun Gothic"/>
                 <a:cs typeface="Malgun Gothic"/>
               </a:rPr>
-              <a:t>© HANWHA SYSTEMS ICT · IT-HW-003 · 사내 일반</a:t>
+              <a:t>© 가상 ICT 기업 · IT-HW-003 · 사내 일반</a:t>
             </a:r>
           </a:p>
         </p:txBody>
@@ -6791,7 +6791,7 @@
                 <a:ea typeface="Malgun Gothic"/>
                 <a:cs typeface="Malgun Gothic"/>
               </a:rPr>
-              <a:t>© HANWHA SYSTEMS ICT · IT-HW-003 · 사내 일반</a:t>
+              <a:t>© 가상 ICT 기업 · IT-HW-003 · 사내 일반</a:t>
             </a:r>
           </a:p>
         </p:txBody>
@@ -8669,7 +8669,7 @@
                 <a:ea typeface="Malgun Gothic"/>
                 <a:cs typeface="Malgun Gothic"/>
               </a:rPr>
-              <a:t>© HANWHA SYSTEMS ICT · IT-HW-003 · 사내 일반</a:t>
+              <a:t>© 가상 ICT 기업 · IT-HW-003 · 사내 일반</a:t>
             </a:r>
           </a:p>
         </p:txBody>
@@ -9869,7 +9869,7 @@
                 <a:ea typeface="Malgun Gothic"/>
                 <a:cs typeface="Malgun Gothic"/>
               </a:rPr>
-              <a:t>© HANWHA SYSTEMS ICT · IT-HW-003 · 사내 일반</a:t>
+              <a:t>© 가상 ICT 기업 · IT-HW-003 · 사내 일반</a:t>
             </a:r>
           </a:p>
         </p:txBody>
@@ -11771,7 +11771,7 @@
                 <a:ea typeface="Malgun Gothic"/>
                 <a:cs typeface="Malgun Gothic"/>
               </a:rPr>
-              <a:t>© HANWHA SYSTEMS ICT · IT-HW-003 · 사내 일반</a:t>
+              <a:t>© 가상 ICT 기업 · IT-HW-003 · 사내 일반</a:t>
             </a:r>
           </a:p>
         </p:txBody>
@@ -12947,7 +12947,7 @@
                 <a:ea typeface="Malgun Gothic"/>
                 <a:cs typeface="Malgun Gothic"/>
               </a:rPr>
-              <a:t>© HANWHA SYSTEMS ICT · IT-HW-003 · 사내 일반</a:t>
+              <a:t>© 가상 ICT 기업 · IT-HW-003 · 사내 일반</a:t>
             </a:r>
           </a:p>
         </p:txBody>
@@ -14755,7 +14755,7 @@
                 <a:ea typeface="Malgun Gothic"/>
                 <a:cs typeface="Malgun Gothic"/>
               </a:rPr>
-              <a:t>© HANWHA SYSTEMS ICT · IT-HW-003 · 사내 일반</a:t>
+              <a:t>© 가상 ICT 기업 · IT-HW-003 · 사내 일반</a:t>
             </a:r>
           </a:p>
         </p:txBody>
@@ -15931,7 +15931,7 @@
                 <a:ea typeface="Malgun Gothic"/>
                 <a:cs typeface="Malgun Gothic"/>
               </a:rPr>
-              <a:t>© HANWHA SYSTEMS ICT · IT-HW-003 · 사내 일반</a:t>
+              <a:t>© 가상 ICT 기업 · IT-HW-003 · 사내 일반</a:t>
             </a:r>
           </a:p>
         </p:txBody>
@@ -17739,7 +17739,7 @@
                 <a:ea typeface="Malgun Gothic"/>
                 <a:cs typeface="Malgun Gothic"/>
               </a:rPr>
-              <a:t>© HANWHA SYSTEMS ICT · IT-HW-003 · 사내 일반</a:t>
+              <a:t>© 가상 ICT 기업 · IT-HW-003 · 사내 일반</a:t>
             </a:r>
           </a:p>
         </p:txBody>
@@ -18915,7 +18915,7 @@
                 <a:ea typeface="Malgun Gothic"/>
                 <a:cs typeface="Malgun Gothic"/>
               </a:rPr>
-              <a:t>© HANWHA SYSTEMS ICT · IT-HW-003 · 사내 일반</a:t>
+              <a:t>© 가상 ICT 기업 · IT-HW-003 · 사내 일반</a:t>
             </a:r>
           </a:p>
         </p:txBody>
@@ -20744,7 +20744,7 @@
                 <a:ea typeface="Malgun Gothic"/>
                 <a:cs typeface="Malgun Gothic"/>
               </a:rPr>
-              <a:t>© HANWHA SYSTEMS ICT · IT-HW-003 · 사내 일반</a:t>
+              <a:t>© 가상 ICT 기업 · IT-HW-003 · 사내 일반</a:t>
             </a:r>
           </a:p>
         </p:txBody>
@@ -22763,7 +22763,7 @@
                 <a:ea typeface="Malgun Gothic"/>
                 <a:cs typeface="Malgun Gothic"/>
               </a:rPr>
-              <a:t>© HANWHA SYSTEMS ICT · IT-HW-003 · 사내 일반</a:t>
+              <a:t>© 가상 ICT 기업 · IT-HW-003 · 사내 일반</a:t>
             </a:r>
           </a:p>
         </p:txBody>
@@ -23375,7 +23375,7 @@
                 <a:ea typeface="Malgun Gothic"/>
                 <a:cs typeface="Malgun Gothic"/>
               </a:rPr>
-              <a:t>© HANWHA SYSTEMS ICT · IT-HW-003 · 사내 일반</a:t>
+              <a:t>© 가상 ICT 기업 · IT-HW-003 · 사내 일반</a:t>
             </a:r>
           </a:p>
         </p:txBody>
@@ -25671,7 +25671,7 @@
                 <a:ea typeface="Malgun Gothic"/>
                 <a:cs typeface="Malgun Gothic"/>
               </a:rPr>
-              <a:t>© HANWHA SYSTEMS ICT · IT-HW-003 · 사내 일반</a:t>
+              <a:t>© 가상 ICT 기업 · IT-HW-003 · 사내 일반</a:t>
             </a:r>
           </a:p>
         </p:txBody>
@@ -26659,7 +26659,7 @@
                 <a:ea typeface="Malgun Gothic"/>
                 <a:cs typeface="Malgun Gothic"/>
               </a:rPr>
-              <a:t>© HANWHA SYSTEMS ICT · IT-HW-003 · 사내 일반</a:t>
+              <a:t>© 가상 ICT 기업 · IT-HW-003 · 사내 일반</a:t>
             </a:r>
           </a:p>
         </p:txBody>
@@ -26907,7 +26907,7 @@
                 <a:ea typeface="Malgun Gothic"/>
                 <a:cs typeface="Malgun Gothic"/>
               </a:rPr>
-              <a:t>© HANWHA SYSTEMS ICT · IT-HW-003 · 사내 일반</a:t>
+              <a:t>© 가상 ICT 기업 · IT-HW-003 · 사내 일반</a:t>
             </a:r>
           </a:p>
         </p:txBody>
@@ -27712,7 +27712,7 @@
                 <a:ea typeface="Malgun Gothic"/>
                 <a:cs typeface="Malgun Gothic"/>
               </a:rPr>
-              <a:t>© HANWHA SYSTEMS ICT · IT-HW-003 · 사내 일반</a:t>
+              <a:t>© 가상 ICT 기업 · IT-HW-003 · 사내 일반</a:t>
             </a:r>
           </a:p>
         </p:txBody>
@@ -27960,7 +27960,7 @@
                 <a:ea typeface="Malgun Gothic"/>
                 <a:cs typeface="Malgun Gothic"/>
               </a:rPr>
-              <a:t>© HANWHA SYSTEMS ICT · IT-HW-003 · 사내 일반</a:t>
+              <a:t>© 가상 ICT 기업 · IT-HW-003 · 사내 일반</a:t>
             </a:r>
           </a:p>
         </p:txBody>
@@ -28525,7 +28525,7 @@
                 <a:ea typeface="Malgun Gothic"/>
                 <a:cs typeface="Malgun Gothic"/>
               </a:rPr>
-              <a:t>© HANWHA SYSTEMS ICT · IT-HW-003 · 사내 일반</a:t>
+              <a:t>© 가상 ICT 기업 · IT-HW-003 · 사내 일반</a:t>
             </a:r>
           </a:p>
         </p:txBody>
@@ -28773,7 +28773,7 @@
                 <a:ea typeface="Malgun Gothic"/>
                 <a:cs typeface="Malgun Gothic"/>
               </a:rPr>
-              <a:t>© HANWHA SYSTEMS ICT · IT-HW-003 · 사내 일반</a:t>
+              <a:t>© 가상 ICT 기업 · IT-HW-003 · 사내 일반</a:t>
             </a:r>
           </a:p>
         </p:txBody>
@@ -29285,7 +29285,7 @@
                           <a:ea typeface="Malgun Gothic"/>
                           <a:cs typeface="Malgun Gothic"/>
                         </a:rPr>
-                        <a:t>사내 IT 포털(hanwha-admin) 상단 [챗봇 문의]</a:t>
+                        <a:t>사내 IT 포털 상단 [챗봇 문의]</a:t>
                       </a:r>
                     </a:p>
                   </a:txBody>
@@ -29977,7 +29977,7 @@
                           <a:ea typeface="Malgun Gothic"/>
                           <a:cs typeface="Malgun Gothic"/>
                         </a:rPr>
-                        <a:t>it-helpdesk@hanwha-ict.example</a:t>
+                        <a:t>it-helpdesk@ict.example</a:t>
                       </a:r>
                     </a:p>
                   </a:txBody>
@@ -30276,7 +30276,7 @@
                 <a:ea typeface="Malgun Gothic"/>
                 <a:cs typeface="Malgun Gothic"/>
               </a:rPr>
-              <a:t>© HANWHA SYSTEMS ICT · IT-HW-003 · 사내 일반</a:t>
+              <a:t>© 가상 ICT 기업 · IT-HW-003 · 사내 일반</a:t>
             </a:r>
           </a:p>
         </p:txBody>
@@ -31552,7 +31552,7 @@
                 <a:ea typeface="Malgun Gothic"/>
                 <a:cs typeface="Malgun Gothic"/>
               </a:rPr>
-              <a:t>© HANWHA SYSTEMS ICT · IT-HW-003 · 사내 일반</a:t>
+              <a:t>© 가상 ICT 기업 · IT-HW-003 · 사내 일반</a:t>
             </a:r>
           </a:p>
         </p:txBody>
@@ -31800,7 +31800,7 @@
                 <a:ea typeface="Malgun Gothic"/>
                 <a:cs typeface="Malgun Gothic"/>
               </a:rPr>
-              <a:t>© HANWHA SYSTEMS ICT · IT-HW-003 · 사내 일반</a:t>
+              <a:t>© 가상 ICT 기업 · IT-HW-003 · 사내 일반</a:t>
             </a:r>
           </a:p>
         </p:txBody>
@@ -33513,7 +33513,7 @@
                 <a:ea typeface="Malgun Gothic"/>
                 <a:cs typeface="Malgun Gothic"/>
               </a:rPr>
-              <a:t>© HANWHA SYSTEMS ICT · IT-HW-003 · 사내 일반</a:t>
+              <a:t>© 가상 ICT 기업 · IT-HW-003 · 사내 일반</a:t>
             </a:r>
           </a:p>
         </p:txBody>
@@ -34490,7 +34490,7 @@
                 <a:ea typeface="Malgun Gothic"/>
                 <a:cs typeface="Malgun Gothic"/>
               </a:rPr>
-              <a:t>© HANWHA SYSTEMS ICT · IT-HW-003 · 사내 일반</a:t>
+              <a:t>© 가상 ICT 기업 · IT-HW-003 · 사내 일반</a:t>
             </a:r>
           </a:p>
         </p:txBody>
@@ -34738,7 +34738,7 @@
                 <a:ea typeface="Malgun Gothic"/>
                 <a:cs typeface="Malgun Gothic"/>
               </a:rPr>
-              <a:t>© HANWHA SYSTEMS ICT · IT-HW-003 · 사내 일반</a:t>
+              <a:t>© 가상 ICT 기업 · IT-HW-003 · 사내 일반</a:t>
             </a:r>
           </a:p>
         </p:txBody>
@@ -35506,7 +35506,7 @@
                 <a:ea typeface="Malgun Gothic"/>
                 <a:cs typeface="Malgun Gothic"/>
               </a:rPr>
-              <a:t>© HANWHA SYSTEMS ICT · IT-HW-003 · 사내 일반</a:t>
+              <a:t>© 가상 ICT 기업 · IT-HW-003 · 사내 일반</a:t>
             </a:r>
           </a:p>
         </p:txBody>
@@ -35754,7 +35754,7 @@
                 <a:ea typeface="Malgun Gothic"/>
                 <a:cs typeface="Malgun Gothic"/>
               </a:rPr>
-              <a:t>© HANWHA SYSTEMS ICT · IT-HW-003 · 사내 일반</a:t>
+              <a:t>© 가상 ICT 기업 · IT-HW-003 · 사내 일반</a:t>
             </a:r>
           </a:p>
         </p:txBody>
@@ -36413,7 +36413,7 @@
                 <a:ea typeface="Malgun Gothic"/>
                 <a:cs typeface="Malgun Gothic"/>
               </a:rPr>
-              <a:t>© HANWHA SYSTEMS ICT · IT-HW-003 · 사내 일반</a:t>
+              <a:t>© 가상 ICT 기업 · IT-HW-003 · 사내 일반</a:t>
             </a:r>
           </a:p>
         </p:txBody>
@@ -36661,7 +36661,7 @@
                 <a:ea typeface="Malgun Gothic"/>
                 <a:cs typeface="Malgun Gothic"/>
               </a:rPr>
-              <a:t>© HANWHA SYSTEMS ICT · IT-HW-003 · 사내 일반</a:t>
+              <a:t>© 가상 ICT 기업 · IT-HW-003 · 사내 일반</a:t>
             </a:r>
           </a:p>
         </p:txBody>
@@ -39189,7 +39189,7 @@
                 <a:ea typeface="Malgun Gothic"/>
                 <a:cs typeface="Malgun Gothic"/>
               </a:rPr>
-              <a:t>© HANWHA SYSTEMS ICT · IT-HW-003 · 사내 일반</a:t>
+              <a:t>© 가상 ICT 기업 · IT-HW-003 · 사내 일반</a:t>
             </a:r>
           </a:p>
         </p:txBody>
